--- a/Main/Study/First Sem/All Notes and Resources Combined/AOS Notes/Unit 4.3-Chapter 10 (Intro. to Multimedia Systems) - to teach.pptx
+++ b/Main/Study/First Sem/All Notes and Resources Combined/AOS Notes/Unit 4.3-Chapter 10 (Intro. to Multimedia Systems) - to teach.pptx
@@ -176,7 +176,58 @@
 <file path=ppt/changesInfos/changesInfo1.xml><?xml version="1.0" encoding="utf-8"?>
 <pc:chgInfo xmlns:a="http://schemas.openxmlformats.org/drawingml/2006/main" xmlns:r="http://schemas.openxmlformats.org/officeDocument/2006/relationships" xmlns:ac="http://schemas.microsoft.com/office/drawing/2013/main/command" xmlns:pc="http://schemas.microsoft.com/office/powerpoint/2013/main/command">
   <pc:docChgLst>
-    <pc:chgData name="Binod Kumar Adhikari" userId="256f5a90-d823-4e8d-9a41-a3da19f4a0ad" providerId="ADAL" clId="{B27C2C78-7FB4-4455-AA64-6E5D5F166320}"/>
+    <pc:chgData name="Yujan Basnet" userId="495fd8277ebfbaef" providerId="LiveId" clId="{AD1410F4-4FD8-468B-A2D6-FD4A991D63D7}"/>
+    <pc:docChg chg="modSld">
+      <pc:chgData name="Yujan Basnet" userId="495fd8277ebfbaef" providerId="LiveId" clId="{AD1410F4-4FD8-468B-A2D6-FD4A991D63D7}" dt="2025-06-20T01:08:06.534" v="3" actId="207"/>
+      <pc:docMkLst>
+        <pc:docMk/>
+      </pc:docMkLst>
+      <pc:sldChg chg="modSp mod">
+        <pc:chgData name="Yujan Basnet" userId="495fd8277ebfbaef" providerId="LiveId" clId="{AD1410F4-4FD8-468B-A2D6-FD4A991D63D7}" dt="2025-06-19T13:31:32.603" v="0" actId="207"/>
+        <pc:sldMkLst>
+          <pc:docMk/>
+          <pc:sldMk cId="0" sldId="259"/>
+        </pc:sldMkLst>
+        <pc:spChg chg="mod">
+          <ac:chgData name="Yujan Basnet" userId="495fd8277ebfbaef" providerId="LiveId" clId="{AD1410F4-4FD8-468B-A2D6-FD4A991D63D7}" dt="2025-06-19T13:31:32.603" v="0" actId="207"/>
+          <ac:spMkLst>
+            <pc:docMk/>
+            <pc:sldMk cId="0" sldId="259"/>
+            <ac:spMk id="3" creationId="{00000000-0000-0000-0000-000000000000}"/>
+          </ac:spMkLst>
+        </pc:spChg>
+      </pc:sldChg>
+      <pc:sldChg chg="modSp mod">
+        <pc:chgData name="Yujan Basnet" userId="495fd8277ebfbaef" providerId="LiveId" clId="{AD1410F4-4FD8-468B-A2D6-FD4A991D63D7}" dt="2025-06-19T14:04:15.580" v="2" actId="207"/>
+        <pc:sldMkLst>
+          <pc:docMk/>
+          <pc:sldMk cId="0" sldId="277"/>
+        </pc:sldMkLst>
+        <pc:spChg chg="mod">
+          <ac:chgData name="Yujan Basnet" userId="495fd8277ebfbaef" providerId="LiveId" clId="{AD1410F4-4FD8-468B-A2D6-FD4A991D63D7}" dt="2025-06-19T14:04:15.580" v="2" actId="207"/>
+          <ac:spMkLst>
+            <pc:docMk/>
+            <pc:sldMk cId="0" sldId="277"/>
+            <ac:spMk id="3" creationId="{00000000-0000-0000-0000-000000000000}"/>
+          </ac:spMkLst>
+        </pc:spChg>
+      </pc:sldChg>
+      <pc:sldChg chg="modSp mod">
+        <pc:chgData name="Yujan Basnet" userId="495fd8277ebfbaef" providerId="LiveId" clId="{AD1410F4-4FD8-468B-A2D6-FD4A991D63D7}" dt="2025-06-20T01:08:06.534" v="3" actId="207"/>
+        <pc:sldMkLst>
+          <pc:docMk/>
+          <pc:sldMk cId="0" sldId="288"/>
+        </pc:sldMkLst>
+        <pc:spChg chg="mod">
+          <ac:chgData name="Yujan Basnet" userId="495fd8277ebfbaef" providerId="LiveId" clId="{AD1410F4-4FD8-468B-A2D6-FD4A991D63D7}" dt="2025-06-20T01:08:06.534" v="3" actId="207"/>
+          <ac:spMkLst>
+            <pc:docMk/>
+            <pc:sldMk cId="0" sldId="288"/>
+            <ac:spMk id="3" creationId="{00000000-0000-0000-0000-000000000000}"/>
+          </ac:spMkLst>
+        </pc:spChg>
+      </pc:sldChg>
+    </pc:docChg>
   </pc:docChgLst>
   <pc:docChgLst>
     <pc:chgData name="Binod Kumar Adhikari" userId="256f5a90-d823-4e8d-9a41-a3da19f4a0ad" providerId="ADAL" clId="{CA7603F1-69B8-4097-AEE9-CC716083FDD7}"/>
@@ -279,7 +330,7 @@
           <a:p>
             <a:fld id="{740F4377-42A6-4672-B12F-BC728A445593}" type="datetimeFigureOut">
               <a:rPr lang="en-IN" smtClean="0"/>
-              <a:t>01-05-2025</a:t>
+              <a:t>20-06-2025</a:t>
             </a:fld>
             <a:endParaRPr lang="en-IN"/>
           </a:p>
@@ -7633,7 +7684,7 @@
               </a:rPr>
               <a:t>50:1</a:t>
             </a:r>
-            <a:endParaRPr sz="3200">
+            <a:endParaRPr sz="3200" dirty="0">
               <a:latin typeface="Calibri"/>
               <a:cs typeface="Calibri"/>
             </a:endParaRPr>
@@ -7701,7 +7752,7 @@
               </a:rPr>
               <a:t>gigabytes</a:t>
             </a:r>
-            <a:endParaRPr sz="2400">
+            <a:endParaRPr sz="2400" dirty="0">
               <a:latin typeface="Calibri"/>
               <a:cs typeface="Calibri"/>
             </a:endParaRPr>
@@ -7770,10 +7821,6 @@
               </a:rPr>
               <a:t>original</a:t>
             </a:r>
-            <a:endParaRPr sz="3200">
-              <a:latin typeface="Calibri"/>
-              <a:cs typeface="Calibri"/>
-            </a:endParaRPr>
           </a:p>
           <a:p>
             <a:pPr marL="1155700" lvl="1" indent="-229235">
@@ -7817,7 +7864,7 @@
               </a:rPr>
               <a:t>paused</a:t>
             </a:r>
-            <a:endParaRPr sz="2400">
+            <a:endParaRPr sz="2400" dirty="0">
               <a:latin typeface="Calibri"/>
               <a:cs typeface="Calibri"/>
             </a:endParaRPr>
@@ -7872,7 +7919,7 @@
               </a:rPr>
               <a:t>decoder</a:t>
             </a:r>
-            <a:endParaRPr sz="3200">
+            <a:endParaRPr sz="3200" dirty="0">
               <a:latin typeface="Calibri"/>
               <a:cs typeface="Calibri"/>
             </a:endParaRPr>
@@ -7940,7 +7987,7 @@
               </a:rPr>
               <a:t>okay</a:t>
             </a:r>
-            <a:endParaRPr sz="2400">
+            <a:endParaRPr sz="2400" dirty="0">
               <a:latin typeface="Calibri"/>
               <a:cs typeface="Calibri"/>
             </a:endParaRPr>
@@ -7981,7 +8028,7 @@
               </a:rPr>
               <a:t>controls</a:t>
             </a:r>
-            <a:endParaRPr sz="3200">
+            <a:endParaRPr sz="3200" dirty="0">
               <a:latin typeface="Calibri"/>
               <a:cs typeface="Calibri"/>
             </a:endParaRPr>
@@ -8042,7 +8089,7 @@
               </a:rPr>
               <a:t>reverse</a:t>
             </a:r>
-            <a:endParaRPr sz="2400">
+            <a:endParaRPr sz="2400" dirty="0">
               <a:latin typeface="Calibri"/>
               <a:cs typeface="Calibri"/>
             </a:endParaRPr>
@@ -8271,10 +8318,6 @@
               </a:rPr>
               <a:t>)</a:t>
             </a:r>
-            <a:endParaRPr sz="2400">
-              <a:latin typeface="Calibri"/>
-              <a:cs typeface="Calibri"/>
-            </a:endParaRPr>
           </a:p>
           <a:p>
             <a:pPr marL="756285" lvl="1" indent="-287020">
@@ -8396,10 +8439,6 @@
               </a:rPr>
               <a:t>)</a:t>
             </a:r>
-            <a:endParaRPr sz="2000">
-              <a:latin typeface="Calibri"/>
-              <a:cs typeface="Calibri"/>
-            </a:endParaRPr>
           </a:p>
           <a:p>
             <a:pPr marL="756285" lvl="1" indent="-287020">
@@ -8420,7 +8459,7 @@
               </a:rPr>
               <a:t>Multi-layer</a:t>
             </a:r>
-            <a:endParaRPr sz="2000">
+            <a:endParaRPr sz="2000" dirty="0">
               <a:latin typeface="Calibri"/>
               <a:cs typeface="Calibri"/>
             </a:endParaRPr>
@@ -8524,7 +8563,7 @@
               </a:rPr>
               <a:t>information</a:t>
             </a:r>
-            <a:endParaRPr sz="1800">
+            <a:endParaRPr sz="1800" dirty="0">
               <a:latin typeface="Calibri"/>
               <a:cs typeface="Calibri"/>
             </a:endParaRPr>
@@ -8583,7 +8622,7 @@
               </a:rPr>
               <a:t>stream</a:t>
             </a:r>
-            <a:endParaRPr sz="1800">
+            <a:endParaRPr sz="1800" dirty="0">
               <a:latin typeface="Calibri"/>
               <a:cs typeface="Calibri"/>
             </a:endParaRPr>
@@ -8691,7 +8730,7 @@
               </a:rPr>
               <a:t>streams</a:t>
             </a:r>
-            <a:endParaRPr sz="1800">
+            <a:endParaRPr sz="1800" dirty="0">
               <a:latin typeface="Calibri"/>
               <a:cs typeface="Calibri"/>
             </a:endParaRPr>
@@ -8729,7 +8768,7 @@
               </a:rPr>
               <a:t>standards</a:t>
             </a:r>
-            <a:endParaRPr sz="2400">
+            <a:endParaRPr sz="2400" dirty="0">
               <a:latin typeface="Calibri"/>
               <a:cs typeface="Calibri"/>
             </a:endParaRPr>
@@ -8868,7 +8907,458 @@
               </a:rPr>
               <a:t>quality)</a:t>
             </a:r>
-            <a:endParaRPr sz="2000">
+          </a:p>
+          <a:p>
+            <a:pPr marL="1155700" lvl="2" indent="-229235">
+              <a:lnSpc>
+                <a:spcPct val="100000"/>
+              </a:lnSpc>
+              <a:spcBef>
+                <a:spcPts val="10"/>
+              </a:spcBef>
+              <a:buFont typeface="Arial MT"/>
+              <a:buChar char="•"/>
+              <a:tabLst>
+                <a:tab pos="1155700" algn="l"/>
+                <a:tab pos="1156335" algn="l"/>
+              </a:tabLst>
+            </a:pPr>
+            <a:r>
+              <a:rPr sz="1800" spc="-15" dirty="0">
+                <a:latin typeface="Calibri"/>
+                <a:cs typeface="Calibri"/>
+              </a:rPr>
+              <a:t>Layer </a:t>
+            </a:r>
+            <a:r>
+              <a:rPr sz="1800" dirty="0">
+                <a:latin typeface="Calibri"/>
+                <a:cs typeface="Calibri"/>
+              </a:rPr>
+              <a:t>3</a:t>
+            </a:r>
+            <a:r>
+              <a:rPr sz="1800" spc="-10" dirty="0">
+                <a:latin typeface="Calibri"/>
+                <a:cs typeface="Calibri"/>
+              </a:rPr>
+              <a:t> </a:t>
+            </a:r>
+            <a:r>
+              <a:rPr sz="1800" dirty="0">
+                <a:latin typeface="Calibri"/>
+                <a:cs typeface="Calibri"/>
+              </a:rPr>
+              <a:t>= </a:t>
+            </a:r>
+            <a:r>
+              <a:rPr sz="1800" spc="-5" dirty="0">
+                <a:latin typeface="Calibri"/>
+                <a:cs typeface="Calibri"/>
+              </a:rPr>
+              <a:t>MP3</a:t>
+            </a:r>
+            <a:r>
+              <a:rPr sz="1800" spc="-10" dirty="0">
+                <a:latin typeface="Calibri"/>
+                <a:cs typeface="Calibri"/>
+              </a:rPr>
+              <a:t> </a:t>
+            </a:r>
+            <a:r>
+              <a:rPr sz="1800" dirty="0">
+                <a:latin typeface="Calibri"/>
+                <a:cs typeface="Calibri"/>
+              </a:rPr>
+              <a:t>Audio</a:t>
+            </a:r>
+            <a:r>
+              <a:rPr sz="1800" spc="-10" dirty="0">
+                <a:latin typeface="Calibri"/>
+                <a:cs typeface="Calibri"/>
+              </a:rPr>
+              <a:t> standard</a:t>
+            </a:r>
+            <a:endParaRPr sz="1800" dirty="0">
+              <a:latin typeface="Calibri"/>
+              <a:cs typeface="Calibri"/>
+            </a:endParaRPr>
+          </a:p>
+          <a:p>
+            <a:pPr marL="1155700" lvl="2" indent="-229235">
+              <a:lnSpc>
+                <a:spcPts val="2155"/>
+              </a:lnSpc>
+              <a:buFont typeface="Arial MT"/>
+              <a:buChar char="•"/>
+              <a:tabLst>
+                <a:tab pos="1155700" algn="l"/>
+                <a:tab pos="1156335" algn="l"/>
+              </a:tabLst>
+            </a:pPr>
+            <a:r>
+              <a:rPr sz="1800" spc="-20" dirty="0">
+                <a:latin typeface="Calibri"/>
+                <a:cs typeface="Calibri"/>
+              </a:rPr>
+              <a:t>Typical</a:t>
+            </a:r>
+            <a:r>
+              <a:rPr sz="1800" spc="-5" dirty="0">
+                <a:latin typeface="Calibri"/>
+                <a:cs typeface="Calibri"/>
+              </a:rPr>
+              <a:t> uses:–</a:t>
+            </a:r>
+            <a:r>
+              <a:rPr sz="1800" spc="10" dirty="0">
+                <a:latin typeface="Calibri"/>
+                <a:cs typeface="Calibri"/>
+              </a:rPr>
+              <a:t> </a:t>
+            </a:r>
+            <a:r>
+              <a:rPr sz="1800" dirty="0">
+                <a:latin typeface="Calibri"/>
+                <a:cs typeface="Calibri"/>
+              </a:rPr>
+              <a:t>video</a:t>
+            </a:r>
+            <a:r>
+              <a:rPr sz="1800" spc="15" dirty="0">
+                <a:latin typeface="Calibri"/>
+                <a:cs typeface="Calibri"/>
+              </a:rPr>
+              <a:t> </a:t>
+            </a:r>
+            <a:r>
+              <a:rPr sz="1800" spc="-10" dirty="0">
+                <a:latin typeface="Calibri"/>
+                <a:cs typeface="Calibri"/>
+              </a:rPr>
+              <a:t>clips</a:t>
+            </a:r>
+            <a:r>
+              <a:rPr sz="1800" spc="20" dirty="0">
+                <a:latin typeface="Calibri"/>
+                <a:cs typeface="Calibri"/>
+              </a:rPr>
+              <a:t> </a:t>
+            </a:r>
+            <a:r>
+              <a:rPr sz="1800" spc="-5" dirty="0">
+                <a:latin typeface="Calibri"/>
+                <a:cs typeface="Calibri"/>
+              </a:rPr>
+              <a:t>on</a:t>
+            </a:r>
+            <a:r>
+              <a:rPr sz="1800" spc="15" dirty="0">
+                <a:latin typeface="Calibri"/>
+                <a:cs typeface="Calibri"/>
+              </a:rPr>
+              <a:t> </a:t>
+            </a:r>
+            <a:r>
+              <a:rPr sz="1800" spc="-10" dirty="0">
+                <a:latin typeface="Calibri"/>
+                <a:cs typeface="Calibri"/>
+              </a:rPr>
+              <a:t>internet;</a:t>
+            </a:r>
+            <a:r>
+              <a:rPr sz="1800" spc="15" dirty="0">
+                <a:latin typeface="Calibri"/>
+                <a:cs typeface="Calibri"/>
+              </a:rPr>
+              <a:t> </a:t>
+            </a:r>
+            <a:r>
+              <a:rPr sz="1800" dirty="0">
+                <a:latin typeface="Calibri"/>
+                <a:cs typeface="Calibri"/>
+              </a:rPr>
+              <a:t>video</a:t>
+            </a:r>
+            <a:r>
+              <a:rPr sz="1800" spc="20" dirty="0">
+                <a:latin typeface="Calibri"/>
+                <a:cs typeface="Calibri"/>
+              </a:rPr>
+              <a:t> </a:t>
+            </a:r>
+            <a:r>
+              <a:rPr sz="1800" spc="-15" dirty="0">
+                <a:latin typeface="Calibri"/>
+                <a:cs typeface="Calibri"/>
+              </a:rPr>
+              <a:t>for</a:t>
+            </a:r>
+            <a:r>
+              <a:rPr sz="1800" dirty="0">
+                <a:latin typeface="Calibri"/>
+                <a:cs typeface="Calibri"/>
+              </a:rPr>
+              <a:t> </a:t>
+            </a:r>
+            <a:r>
+              <a:rPr sz="1800" spc="-5" dirty="0">
+                <a:latin typeface="Calibri"/>
+                <a:cs typeface="Calibri"/>
+              </a:rPr>
+              <a:t>handhelds</a:t>
+            </a:r>
+            <a:endParaRPr sz="1800" dirty="0">
+              <a:latin typeface="Calibri"/>
+              <a:cs typeface="Calibri"/>
+            </a:endParaRPr>
+          </a:p>
+          <a:p>
+            <a:pPr marL="756285" lvl="1" indent="-287020">
+              <a:lnSpc>
+                <a:spcPts val="2395"/>
+              </a:lnSpc>
+              <a:buFont typeface="Arial MT"/>
+              <a:buChar char="–"/>
+              <a:tabLst>
+                <a:tab pos="756285" algn="l"/>
+                <a:tab pos="756920" algn="l"/>
+              </a:tabLst>
+            </a:pPr>
+            <a:r>
+              <a:rPr sz="2000" spc="-5" dirty="0">
+                <a:latin typeface="Calibri"/>
+                <a:cs typeface="Calibri"/>
+              </a:rPr>
+              <a:t>MPEG-2</a:t>
+            </a:r>
+            <a:r>
+              <a:rPr sz="2000" spc="-20" dirty="0">
+                <a:latin typeface="Calibri"/>
+                <a:cs typeface="Calibri"/>
+              </a:rPr>
+              <a:t> </a:t>
+            </a:r>
+            <a:r>
+              <a:rPr sz="2000" dirty="0">
+                <a:latin typeface="Calibri"/>
+                <a:cs typeface="Calibri"/>
+              </a:rPr>
+              <a:t>–</a:t>
+            </a:r>
+            <a:r>
+              <a:rPr sz="2000" spc="-15" dirty="0">
+                <a:latin typeface="Calibri"/>
+                <a:cs typeface="Calibri"/>
+              </a:rPr>
+              <a:t> </a:t>
+            </a:r>
+            <a:r>
+              <a:rPr sz="2000" spc="-10" dirty="0">
+                <a:latin typeface="Calibri"/>
+                <a:cs typeface="Calibri"/>
+              </a:rPr>
+              <a:t>standard</a:t>
+            </a:r>
+            <a:r>
+              <a:rPr sz="2000" dirty="0">
+                <a:latin typeface="Calibri"/>
+                <a:cs typeface="Calibri"/>
+              </a:rPr>
+              <a:t> </a:t>
+            </a:r>
+            <a:r>
+              <a:rPr sz="2000" spc="-5" dirty="0">
+                <a:latin typeface="Calibri"/>
+                <a:cs typeface="Calibri"/>
+              </a:rPr>
+              <a:t>TV</a:t>
+            </a:r>
+            <a:r>
+              <a:rPr sz="2000" spc="-15" dirty="0">
+                <a:latin typeface="Calibri"/>
+                <a:cs typeface="Calibri"/>
+              </a:rPr>
+              <a:t> </a:t>
+            </a:r>
+            <a:r>
+              <a:rPr sz="2000" dirty="0">
+                <a:latin typeface="Calibri"/>
+                <a:cs typeface="Calibri"/>
+              </a:rPr>
+              <a:t>&amp;</a:t>
+            </a:r>
+            <a:r>
+              <a:rPr sz="2000" spc="-10" dirty="0">
+                <a:latin typeface="Calibri"/>
+                <a:cs typeface="Calibri"/>
+              </a:rPr>
+              <a:t> </a:t>
+            </a:r>
+            <a:r>
+              <a:rPr sz="2000" spc="-30" dirty="0">
+                <a:latin typeface="Calibri"/>
+                <a:cs typeface="Calibri"/>
+              </a:rPr>
+              <a:t>HDTV;</a:t>
+            </a:r>
+            <a:r>
+              <a:rPr sz="2000" dirty="0">
+                <a:latin typeface="Calibri"/>
+                <a:cs typeface="Calibri"/>
+              </a:rPr>
+              <a:t> 1.5-15</a:t>
+            </a:r>
+            <a:r>
+              <a:rPr sz="2000" spc="-25" dirty="0">
+                <a:latin typeface="Calibri"/>
+                <a:cs typeface="Calibri"/>
+              </a:rPr>
+              <a:t> </a:t>
+            </a:r>
+            <a:r>
+              <a:rPr sz="2000" spc="-10" dirty="0">
+                <a:latin typeface="Calibri"/>
+                <a:cs typeface="Calibri"/>
+              </a:rPr>
+              <a:t>mb/sec</a:t>
+            </a:r>
+            <a:endParaRPr sz="2000" dirty="0">
+              <a:latin typeface="Calibri"/>
+              <a:cs typeface="Calibri"/>
+            </a:endParaRPr>
+          </a:p>
+          <a:p>
+            <a:pPr marL="1155700" lvl="2" indent="-229235">
+              <a:lnSpc>
+                <a:spcPts val="2155"/>
+              </a:lnSpc>
+              <a:spcBef>
+                <a:spcPts val="10"/>
+              </a:spcBef>
+              <a:buFont typeface="Arial MT"/>
+              <a:buChar char="•"/>
+              <a:tabLst>
+                <a:tab pos="1155700" algn="l"/>
+                <a:tab pos="1156335" algn="l"/>
+              </a:tabLst>
+            </a:pPr>
+            <a:r>
+              <a:rPr sz="1800" spc="-15" dirty="0">
+                <a:latin typeface="Calibri"/>
+                <a:cs typeface="Calibri"/>
+              </a:rPr>
+              <a:t>DVD</a:t>
+            </a:r>
+            <a:r>
+              <a:rPr sz="1800" spc="-35" dirty="0">
+                <a:latin typeface="Calibri"/>
+                <a:cs typeface="Calibri"/>
+              </a:rPr>
+              <a:t> </a:t>
+            </a:r>
+            <a:r>
+              <a:rPr sz="1800" spc="-5" dirty="0">
+                <a:latin typeface="Calibri"/>
+                <a:cs typeface="Calibri"/>
+              </a:rPr>
+              <a:t>encoding</a:t>
+            </a:r>
+            <a:endParaRPr sz="1800" dirty="0">
+              <a:latin typeface="Calibri"/>
+              <a:cs typeface="Calibri"/>
+            </a:endParaRPr>
+          </a:p>
+          <a:p>
+            <a:pPr marL="756285" lvl="1" indent="-287020">
+              <a:lnSpc>
+                <a:spcPts val="2395"/>
+              </a:lnSpc>
+              <a:buFont typeface="Arial MT"/>
+              <a:buChar char="–"/>
+              <a:tabLst>
+                <a:tab pos="756285" algn="l"/>
+                <a:tab pos="756920" algn="l"/>
+              </a:tabLst>
+            </a:pPr>
+            <a:r>
+              <a:rPr sz="2000" spc="-5" dirty="0">
+                <a:latin typeface="Calibri"/>
+                <a:cs typeface="Calibri"/>
+              </a:rPr>
+              <a:t>MPEG-4</a:t>
+            </a:r>
+            <a:r>
+              <a:rPr sz="2000" spc="-20" dirty="0">
+                <a:latin typeface="Calibri"/>
+                <a:cs typeface="Calibri"/>
+              </a:rPr>
+              <a:t> </a:t>
+            </a:r>
+            <a:r>
+              <a:rPr sz="2000" dirty="0">
+                <a:latin typeface="Calibri"/>
+                <a:cs typeface="Calibri"/>
+              </a:rPr>
+              <a:t>–</a:t>
+            </a:r>
+            <a:r>
+              <a:rPr sz="2000" spc="-15" dirty="0">
+                <a:latin typeface="Calibri"/>
+                <a:cs typeface="Calibri"/>
+              </a:rPr>
+              <a:t> </a:t>
+            </a:r>
+            <a:r>
+              <a:rPr sz="2000" spc="-5" dirty="0">
+                <a:latin typeface="Calibri"/>
+                <a:cs typeface="Calibri"/>
+              </a:rPr>
+              <a:t>combined audio,</a:t>
+            </a:r>
+            <a:r>
+              <a:rPr sz="2000" spc="-20" dirty="0">
+                <a:latin typeface="Calibri"/>
+                <a:cs typeface="Calibri"/>
+              </a:rPr>
+              <a:t> </a:t>
+            </a:r>
+            <a:r>
+              <a:rPr sz="2000" spc="-10" dirty="0">
+                <a:latin typeface="Calibri"/>
+                <a:cs typeface="Calibri"/>
+              </a:rPr>
+              <a:t>video,</a:t>
+            </a:r>
+            <a:r>
+              <a:rPr sz="2000" dirty="0">
+                <a:latin typeface="Calibri"/>
+                <a:cs typeface="Calibri"/>
+              </a:rPr>
+              <a:t> </a:t>
+            </a:r>
+            <a:r>
+              <a:rPr sz="2000" spc="-15" dirty="0">
+                <a:latin typeface="Calibri"/>
+                <a:cs typeface="Calibri"/>
+              </a:rPr>
+              <a:t>interactive</a:t>
+            </a:r>
+            <a:r>
+              <a:rPr sz="2000" spc="25" dirty="0">
+                <a:latin typeface="Calibri"/>
+                <a:cs typeface="Calibri"/>
+              </a:rPr>
+              <a:t> </a:t>
+            </a:r>
+            <a:r>
+              <a:rPr sz="2000" spc="-5" dirty="0">
+                <a:latin typeface="Calibri"/>
+                <a:cs typeface="Calibri"/>
+              </a:rPr>
+              <a:t>graphics</a:t>
+            </a:r>
+            <a:endParaRPr sz="2000" dirty="0">
               <a:latin typeface="Calibri"/>
               <a:cs typeface="Calibri"/>
             </a:endParaRPr>
@@ -8889,510 +9379,55 @@
               </a:tabLst>
             </a:pPr>
             <a:r>
+              <a:rPr sz="1800" dirty="0">
+                <a:latin typeface="Calibri"/>
+                <a:cs typeface="Calibri"/>
+              </a:rPr>
+              <a:t>2D</a:t>
+            </a:r>
+            <a:r>
+              <a:rPr sz="1800" spc="-25" dirty="0">
+                <a:latin typeface="Calibri"/>
+                <a:cs typeface="Calibri"/>
+              </a:rPr>
+              <a:t> </a:t>
+            </a:r>
+            <a:r>
+              <a:rPr sz="1800" dirty="0">
+                <a:latin typeface="Calibri"/>
+                <a:cs typeface="Calibri"/>
+              </a:rPr>
+              <a:t>&amp;</a:t>
+            </a:r>
+            <a:r>
               <a:rPr sz="1800" spc="-15" dirty="0">
                 <a:latin typeface="Calibri"/>
                 <a:cs typeface="Calibri"/>
               </a:rPr>
-              <a:t>Layer </a:t>
+              <a:t> </a:t>
             </a:r>
             <a:r>
               <a:rPr sz="1800" dirty="0">
                 <a:latin typeface="Calibri"/>
                 <a:cs typeface="Calibri"/>
               </a:rPr>
-              <a:t>3</a:t>
-            </a:r>
-            <a:r>
-              <a:rPr sz="1800" spc="-10" dirty="0">
-                <a:latin typeface="Calibri"/>
-                <a:cs typeface="Calibri"/>
-              </a:rPr>
-              <a:t> </a:t>
-            </a:r>
-            <a:r>
-              <a:rPr sz="1800" dirty="0">
-                <a:latin typeface="Calibri"/>
-                <a:cs typeface="Calibri"/>
-              </a:rPr>
-              <a:t>= </a:t>
+              <a:t>3D</a:t>
+            </a:r>
+            <a:r>
+              <a:rPr sz="1800" spc="-15" dirty="0">
+                <a:latin typeface="Calibri"/>
+                <a:cs typeface="Calibri"/>
+              </a:rPr>
+              <a:t> </a:t>
             </a:r>
             <a:r>
               <a:rPr sz="1800" spc="-5" dirty="0">
                 <a:latin typeface="Calibri"/>
                 <a:cs typeface="Calibri"/>
               </a:rPr>
-              <a:t>MP3</a:t>
-            </a:r>
-            <a:r>
-              <a:rPr sz="1800" spc="-10" dirty="0">
-                <a:latin typeface="Calibri"/>
-                <a:cs typeface="Calibri"/>
-              </a:rPr>
-              <a:t> </a:t>
-            </a:r>
-            <a:r>
-              <a:rPr sz="1800" dirty="0">
-                <a:latin typeface="Calibri"/>
-                <a:cs typeface="Calibri"/>
-              </a:rPr>
-              <a:t>Audio</a:t>
-            </a:r>
-            <a:r>
-              <a:rPr sz="1800" spc="-10" dirty="0">
-                <a:latin typeface="Calibri"/>
-                <a:cs typeface="Calibri"/>
-              </a:rPr>
-              <a:t> standard</a:t>
-            </a:r>
-            <a:endParaRPr sz="1800">
-              <a:latin typeface="Calibri"/>
-              <a:cs typeface="Calibri"/>
-            </a:endParaRPr>
-          </a:p>
-          <a:p>
-            <a:pPr marL="1155700" lvl="2" indent="-229235">
-              <a:lnSpc>
-                <a:spcPts val="2155"/>
-              </a:lnSpc>
-              <a:buFont typeface="Arial MT"/>
-              <a:buChar char="•"/>
-              <a:tabLst>
-                <a:tab pos="1155700" algn="l"/>
-                <a:tab pos="1156335" algn="l"/>
-              </a:tabLst>
-            </a:pPr>
-            <a:r>
-              <a:rPr sz="1800" spc="-20" dirty="0">
-                <a:latin typeface="Calibri"/>
-                <a:cs typeface="Calibri"/>
-              </a:rPr>
-              <a:t>Typical</a:t>
-            </a:r>
-            <a:r>
-              <a:rPr sz="1800" spc="-5" dirty="0">
-                <a:latin typeface="Calibri"/>
-                <a:cs typeface="Calibri"/>
-              </a:rPr>
-              <a:t> uses:–</a:t>
-            </a:r>
-            <a:r>
-              <a:rPr sz="1800" spc="10" dirty="0">
-                <a:latin typeface="Calibri"/>
-                <a:cs typeface="Calibri"/>
-              </a:rPr>
-              <a:t> </a:t>
-            </a:r>
-            <a:r>
-              <a:rPr sz="1800" dirty="0">
-                <a:latin typeface="Calibri"/>
-                <a:cs typeface="Calibri"/>
-              </a:rPr>
-              <a:t>video</a:t>
-            </a:r>
-            <a:r>
-              <a:rPr sz="1800" spc="15" dirty="0">
-                <a:latin typeface="Calibri"/>
-                <a:cs typeface="Calibri"/>
-              </a:rPr>
-              <a:t> </a:t>
-            </a:r>
-            <a:r>
-              <a:rPr sz="1800" spc="-10" dirty="0">
-                <a:latin typeface="Calibri"/>
-                <a:cs typeface="Calibri"/>
-              </a:rPr>
-              <a:t>clips</a:t>
-            </a:r>
-            <a:r>
-              <a:rPr sz="1800" spc="20" dirty="0">
-                <a:latin typeface="Calibri"/>
-                <a:cs typeface="Calibri"/>
-              </a:rPr>
-              <a:t> </a:t>
-            </a:r>
-            <a:r>
-              <a:rPr sz="1800" spc="-5" dirty="0">
-                <a:latin typeface="Calibri"/>
-                <a:cs typeface="Calibri"/>
-              </a:rPr>
-              <a:t>on</a:t>
-            </a:r>
-            <a:r>
-              <a:rPr sz="1800" spc="15" dirty="0">
-                <a:latin typeface="Calibri"/>
-                <a:cs typeface="Calibri"/>
-              </a:rPr>
-              <a:t> </a:t>
-            </a:r>
-            <a:r>
-              <a:rPr sz="1800" spc="-10" dirty="0">
-                <a:latin typeface="Calibri"/>
-                <a:cs typeface="Calibri"/>
-              </a:rPr>
-              <a:t>internet;</a:t>
-            </a:r>
-            <a:r>
-              <a:rPr sz="1800" spc="15" dirty="0">
-                <a:latin typeface="Calibri"/>
-                <a:cs typeface="Calibri"/>
-              </a:rPr>
-              <a:t> </a:t>
-            </a:r>
-            <a:r>
-              <a:rPr sz="1800" dirty="0">
-                <a:latin typeface="Calibri"/>
-                <a:cs typeface="Calibri"/>
-              </a:rPr>
-              <a:t>video</a:t>
-            </a:r>
-            <a:r>
-              <a:rPr sz="1800" spc="20" dirty="0">
-                <a:latin typeface="Calibri"/>
-                <a:cs typeface="Calibri"/>
-              </a:rPr>
-              <a:t> </a:t>
-            </a:r>
-            <a:r>
-              <a:rPr sz="1800" spc="-15" dirty="0">
-                <a:latin typeface="Calibri"/>
-                <a:cs typeface="Calibri"/>
-              </a:rPr>
-              <a:t>for</a:t>
-            </a:r>
-            <a:r>
-              <a:rPr sz="1800" dirty="0">
-                <a:latin typeface="Calibri"/>
-                <a:cs typeface="Calibri"/>
-              </a:rPr>
-              <a:t> </a:t>
-            </a:r>
-            <a:r>
-              <a:rPr sz="1800" spc="-5" dirty="0">
-                <a:latin typeface="Calibri"/>
-                <a:cs typeface="Calibri"/>
-              </a:rPr>
-              <a:t>handhelds</a:t>
-            </a:r>
-            <a:endParaRPr sz="1800">
-              <a:latin typeface="Calibri"/>
-              <a:cs typeface="Calibri"/>
-            </a:endParaRPr>
-          </a:p>
-          <a:p>
-            <a:pPr marL="756285" lvl="1" indent="-287020">
-              <a:lnSpc>
-                <a:spcPts val="2395"/>
-              </a:lnSpc>
-              <a:buFont typeface="Arial MT"/>
-              <a:buChar char="–"/>
-              <a:tabLst>
-                <a:tab pos="756285" algn="l"/>
-                <a:tab pos="756920" algn="l"/>
-              </a:tabLst>
-            </a:pPr>
-            <a:r>
-              <a:rPr sz="2000" spc="-5" dirty="0">
-                <a:latin typeface="Calibri"/>
-                <a:cs typeface="Calibri"/>
-              </a:rPr>
-              <a:t>MPEG-2</a:t>
-            </a:r>
-            <a:r>
-              <a:rPr sz="2000" spc="-20" dirty="0">
-                <a:latin typeface="Calibri"/>
-                <a:cs typeface="Calibri"/>
-              </a:rPr>
-              <a:t> </a:t>
-            </a:r>
-            <a:r>
-              <a:rPr sz="2000" dirty="0">
-                <a:latin typeface="Calibri"/>
-                <a:cs typeface="Calibri"/>
-              </a:rPr>
-              <a:t>–</a:t>
-            </a:r>
-            <a:r>
-              <a:rPr sz="2000" spc="-15" dirty="0">
-                <a:latin typeface="Calibri"/>
-                <a:cs typeface="Calibri"/>
-              </a:rPr>
-              <a:t> </a:t>
-            </a:r>
-            <a:r>
-              <a:rPr sz="2000" spc="-10" dirty="0">
-                <a:latin typeface="Calibri"/>
-                <a:cs typeface="Calibri"/>
-              </a:rPr>
-              <a:t>standard</a:t>
-            </a:r>
-            <a:r>
-              <a:rPr sz="2000" dirty="0">
-                <a:latin typeface="Calibri"/>
-                <a:cs typeface="Calibri"/>
-              </a:rPr>
-              <a:t> </a:t>
-            </a:r>
-            <a:r>
-              <a:rPr sz="2000" spc="-5" dirty="0">
-                <a:latin typeface="Calibri"/>
-                <a:cs typeface="Calibri"/>
-              </a:rPr>
-              <a:t>TV</a:t>
-            </a:r>
-            <a:r>
-              <a:rPr sz="2000" spc="-15" dirty="0">
-                <a:latin typeface="Calibri"/>
-                <a:cs typeface="Calibri"/>
-              </a:rPr>
-              <a:t> </a:t>
-            </a:r>
-            <a:r>
-              <a:rPr sz="2000" dirty="0">
-                <a:latin typeface="Calibri"/>
-                <a:cs typeface="Calibri"/>
-              </a:rPr>
-              <a:t>&amp;</a:t>
-            </a:r>
-            <a:r>
-              <a:rPr sz="2000" spc="-10" dirty="0">
-                <a:latin typeface="Calibri"/>
-                <a:cs typeface="Calibri"/>
-              </a:rPr>
-              <a:t> </a:t>
-            </a:r>
-            <a:r>
-              <a:rPr sz="2000" spc="-30" dirty="0">
-                <a:latin typeface="Calibri"/>
-                <a:cs typeface="Calibri"/>
-              </a:rPr>
-              <a:t>HDTV;</a:t>
-            </a:r>
-            <a:r>
-              <a:rPr sz="2000" dirty="0">
-                <a:latin typeface="Calibri"/>
-                <a:cs typeface="Calibri"/>
-              </a:rPr>
-              <a:t> 1.5-15</a:t>
-            </a:r>
-            <a:r>
-              <a:rPr sz="2000" spc="-25" dirty="0">
-                <a:latin typeface="Calibri"/>
-                <a:cs typeface="Calibri"/>
-              </a:rPr>
-              <a:t> </a:t>
-            </a:r>
-            <a:r>
-              <a:rPr sz="2000" spc="-10" dirty="0">
-                <a:latin typeface="Calibri"/>
-                <a:cs typeface="Calibri"/>
-              </a:rPr>
-              <a:t>mb/sec</a:t>
-            </a:r>
-            <a:endParaRPr sz="2000">
-              <a:latin typeface="Calibri"/>
-              <a:cs typeface="Calibri"/>
-            </a:endParaRPr>
-          </a:p>
-          <a:p>
-            <a:pPr marL="1155700" lvl="2" indent="-229235">
-              <a:lnSpc>
-                <a:spcPts val="2155"/>
-              </a:lnSpc>
-              <a:spcBef>
-                <a:spcPts val="10"/>
-              </a:spcBef>
-              <a:buFont typeface="Arial MT"/>
-              <a:buChar char="•"/>
-              <a:tabLst>
-                <a:tab pos="1155700" algn="l"/>
-                <a:tab pos="1156335" algn="l"/>
-              </a:tabLst>
-            </a:pPr>
-            <a:r>
-              <a:rPr sz="1800" spc="-15" dirty="0">
-                <a:latin typeface="Calibri"/>
-                <a:cs typeface="Calibri"/>
-              </a:rPr>
-              <a:t>DVD</a:t>
-            </a:r>
-            <a:r>
-              <a:rPr sz="1800" spc="-35" dirty="0">
-                <a:latin typeface="Calibri"/>
-                <a:cs typeface="Calibri"/>
-              </a:rPr>
-              <a:t> </a:t>
-            </a:r>
-            <a:r>
-              <a:rPr sz="1800" spc="-5" dirty="0">
-                <a:latin typeface="Calibri"/>
-                <a:cs typeface="Calibri"/>
-              </a:rPr>
-              <a:t>encoding</a:t>
-            </a:r>
-            <a:endParaRPr sz="1800">
-              <a:latin typeface="Calibri"/>
-              <a:cs typeface="Calibri"/>
-            </a:endParaRPr>
-          </a:p>
-          <a:p>
-            <a:pPr marL="756285" lvl="1" indent="-287020">
-              <a:lnSpc>
-                <a:spcPts val="2395"/>
-              </a:lnSpc>
-              <a:buFont typeface="Arial MT"/>
-              <a:buChar char="–"/>
-              <a:tabLst>
-                <a:tab pos="756285" algn="l"/>
-                <a:tab pos="756920" algn="l"/>
-              </a:tabLst>
-            </a:pPr>
-            <a:r>
-              <a:rPr sz="2000" spc="-5" dirty="0">
-                <a:latin typeface="Calibri"/>
-                <a:cs typeface="Calibri"/>
-              </a:rPr>
-              <a:t>MPEG-4</a:t>
-            </a:r>
-            <a:r>
-              <a:rPr sz="2000" spc="-20" dirty="0">
-                <a:latin typeface="Calibri"/>
-                <a:cs typeface="Calibri"/>
-              </a:rPr>
-              <a:t> </a:t>
-            </a:r>
-            <a:r>
-              <a:rPr sz="2000" dirty="0">
-                <a:latin typeface="Calibri"/>
-                <a:cs typeface="Calibri"/>
-              </a:rPr>
-              <a:t>–</a:t>
-            </a:r>
-            <a:r>
-              <a:rPr sz="2000" spc="-15" dirty="0">
-                <a:latin typeface="Calibri"/>
-                <a:cs typeface="Calibri"/>
-              </a:rPr>
-              <a:t> </a:t>
-            </a:r>
-            <a:r>
-              <a:rPr sz="2000" spc="-5" dirty="0">
-                <a:latin typeface="Calibri"/>
-                <a:cs typeface="Calibri"/>
-              </a:rPr>
-              <a:t>combined audio,</a:t>
-            </a:r>
-            <a:r>
-              <a:rPr sz="2000" spc="-20" dirty="0">
-                <a:latin typeface="Calibri"/>
-                <a:cs typeface="Calibri"/>
-              </a:rPr>
-              <a:t> </a:t>
-            </a:r>
-            <a:r>
-              <a:rPr sz="2000" spc="-10" dirty="0">
-                <a:latin typeface="Calibri"/>
-                <a:cs typeface="Calibri"/>
-              </a:rPr>
-              <a:t>video,</a:t>
-            </a:r>
-            <a:r>
-              <a:rPr sz="2000" dirty="0">
-                <a:latin typeface="Calibri"/>
-                <a:cs typeface="Calibri"/>
-              </a:rPr>
-              <a:t> </a:t>
-            </a:r>
-            <a:r>
-              <a:rPr sz="2000" spc="-15" dirty="0">
-                <a:latin typeface="Calibri"/>
-                <a:cs typeface="Calibri"/>
-              </a:rPr>
-              <a:t>interactive</a:t>
-            </a:r>
-            <a:r>
-              <a:rPr sz="2000" spc="25" dirty="0">
-                <a:latin typeface="Calibri"/>
-                <a:cs typeface="Calibri"/>
-              </a:rPr>
-              <a:t> </a:t>
-            </a:r>
-            <a:r>
-              <a:rPr sz="2000" spc="-5" dirty="0">
-                <a:latin typeface="Calibri"/>
-                <a:cs typeface="Calibri"/>
-              </a:rPr>
-              <a:t>graphics</a:t>
-            </a:r>
-            <a:endParaRPr sz="2000">
-              <a:latin typeface="Calibri"/>
-              <a:cs typeface="Calibri"/>
-            </a:endParaRPr>
-          </a:p>
-          <a:p>
-            <a:pPr marL="1155700" lvl="2" indent="-229235">
-              <a:lnSpc>
-                <a:spcPct val="100000"/>
-              </a:lnSpc>
-              <a:spcBef>
-                <a:spcPts val="10"/>
-              </a:spcBef>
-              <a:buFont typeface="Arial MT"/>
-              <a:buChar char="•"/>
-              <a:tabLst>
-                <a:tab pos="1155700" algn="l"/>
-                <a:tab pos="1156335" algn="l"/>
-              </a:tabLst>
-            </a:pPr>
-            <a:r>
-              <a:rPr sz="1800" dirty="0">
-                <a:latin typeface="Calibri"/>
-                <a:cs typeface="Calibri"/>
-              </a:rPr>
-              <a:t>2D</a:t>
-            </a:r>
-            <a:r>
-              <a:rPr sz="1800" spc="-25" dirty="0">
-                <a:latin typeface="Calibri"/>
-                <a:cs typeface="Calibri"/>
-              </a:rPr>
-              <a:t> </a:t>
-            </a:r>
-            <a:r>
-              <a:rPr sz="1800" dirty="0">
-                <a:latin typeface="Calibri"/>
-                <a:cs typeface="Calibri"/>
-              </a:rPr>
-              <a:t>&amp;</a:t>
-            </a:r>
-            <a:r>
-              <a:rPr sz="1800" spc="-15" dirty="0">
-                <a:latin typeface="Calibri"/>
-                <a:cs typeface="Calibri"/>
-              </a:rPr>
-              <a:t> </a:t>
-            </a:r>
-            <a:r>
-              <a:rPr sz="1800" dirty="0">
-                <a:latin typeface="Calibri"/>
-                <a:cs typeface="Calibri"/>
-              </a:rPr>
-              <a:t>3D</a:t>
-            </a:r>
-            <a:r>
-              <a:rPr sz="1800" spc="-15" dirty="0">
-                <a:latin typeface="Calibri"/>
-                <a:cs typeface="Calibri"/>
-              </a:rPr>
-              <a:t> </a:t>
-            </a:r>
-            <a:r>
-              <a:rPr sz="1800" spc="-5" dirty="0">
-                <a:latin typeface="Calibri"/>
-                <a:cs typeface="Calibri"/>
-              </a:rPr>
               <a:t>animations</a:t>
             </a:r>
-            <a:endParaRPr sz="1800">
+            <a:endParaRPr sz="1800" dirty="0">
               <a:latin typeface="Calibri"/>
               <a:cs typeface="Calibri"/>
             </a:endParaRPr>
@@ -13116,7 +13151,7 @@
         <p:spPr>
           <a:xfrm>
             <a:off x="535940" y="1371600"/>
-            <a:ext cx="8034655" cy="4375150"/>
+            <a:ext cx="8034655" cy="4427493"/>
           </a:xfrm>
           <a:prstGeom prst="rect">
             <a:avLst/>
@@ -13254,27 +13289,39 @@
               <a:t> </a:t>
             </a:r>
             <a:r>
-              <a:rPr sz="3200" i="1" spc="-5" dirty="0">
+              <a:rPr sz="3200" b="1" i="1" spc="-5" dirty="0">
+                <a:solidFill>
+                  <a:srgbClr val="00B050"/>
+                </a:solidFill>
                 <a:latin typeface="Calibri"/>
                 <a:cs typeface="Calibri"/>
               </a:rPr>
               <a:t>temporal</a:t>
             </a:r>
             <a:r>
-              <a:rPr sz="3200" i="1" spc="-15" dirty="0">
-                <a:latin typeface="Calibri"/>
-                <a:cs typeface="Calibri"/>
-              </a:rPr>
-              <a:t> </a:t>
-            </a:r>
-            <a:r>
-              <a:rPr sz="3200" i="1" spc="-5" dirty="0">
+              <a:rPr sz="3200" b="1" i="1" spc="-15" dirty="0">
+                <a:solidFill>
+                  <a:srgbClr val="00B050"/>
+                </a:solidFill>
+                <a:latin typeface="Calibri"/>
+                <a:cs typeface="Calibri"/>
+              </a:rPr>
+              <a:t> </a:t>
+            </a:r>
+            <a:r>
+              <a:rPr sz="3200" b="1" i="1" spc="-5" dirty="0">
+                <a:solidFill>
+                  <a:srgbClr val="00B050"/>
+                </a:solidFill>
                 <a:latin typeface="Calibri"/>
                 <a:cs typeface="Calibri"/>
               </a:rPr>
               <a:t>locality</a:t>
             </a:r>
-            <a:endParaRPr sz="3200" dirty="0">
+            <a:endParaRPr sz="3200" b="1" dirty="0">
+              <a:solidFill>
+                <a:srgbClr val="00B050"/>
+              </a:solidFill>
               <a:latin typeface="Calibri"/>
               <a:cs typeface="Calibri"/>
             </a:endParaRPr>
@@ -27838,7 +27885,7 @@
               </a:rPr>
               <a:t>server.</a:t>
             </a:r>
-            <a:endParaRPr sz="3200">
+            <a:endParaRPr sz="3200" dirty="0">
               <a:latin typeface="Calibri"/>
               <a:cs typeface="Calibri"/>
             </a:endParaRPr>
@@ -27916,6 +27963,9 @@
             </a:r>
             <a:r>
               <a:rPr sz="3200" i="1" spc="-5" dirty="0">
+                <a:solidFill>
+                  <a:srgbClr val="FF0000"/>
+                </a:solidFill>
                 <a:latin typeface="Calibri"/>
                 <a:cs typeface="Calibri"/>
               </a:rPr>
@@ -27923,6 +27973,9 @@
             </a:r>
             <a:r>
               <a:rPr sz="3200" i="1" spc="-705" dirty="0">
+                <a:solidFill>
+                  <a:srgbClr val="FF0000"/>
+                </a:solidFill>
                 <a:latin typeface="Calibri"/>
                 <a:cs typeface="Calibri"/>
               </a:rPr>
@@ -27930,6 +27983,9 @@
             </a:r>
             <a:r>
               <a:rPr sz="3200" i="1" spc="-10" dirty="0">
+                <a:solidFill>
+                  <a:srgbClr val="FF0000"/>
+                </a:solidFill>
                 <a:latin typeface="Calibri"/>
                 <a:cs typeface="Calibri"/>
               </a:rPr>
@@ -27937,12 +27993,18 @@
             </a:r>
             <a:r>
               <a:rPr sz="3200" spc="-10" dirty="0">
+                <a:solidFill>
+                  <a:srgbClr val="FF0000"/>
+                </a:solidFill>
                 <a:latin typeface="Calibri"/>
                 <a:cs typeface="Calibri"/>
               </a:rPr>
               <a:t>algorithm</a:t>
             </a:r>
-            <a:endParaRPr sz="3200">
+            <a:endParaRPr sz="3200" dirty="0">
+              <a:solidFill>
+                <a:srgbClr val="FF0000"/>
+              </a:solidFill>
               <a:latin typeface="Calibri"/>
               <a:cs typeface="Calibri"/>
             </a:endParaRPr>
@@ -28187,7 +28249,7 @@
               </a:rPr>
               <a:t>request</a:t>
             </a:r>
-            <a:endParaRPr sz="2800">
+            <a:endParaRPr sz="2800" dirty="0">
               <a:latin typeface="Calibri"/>
               <a:cs typeface="Calibri"/>
             </a:endParaRPr>
@@ -32609,6 +32671,9 @@
             </a:r>
             <a:r>
               <a:rPr sz="3200" dirty="0">
+                <a:solidFill>
+                  <a:srgbClr val="00B050"/>
+                </a:solidFill>
                 <a:latin typeface="Calibri"/>
                 <a:cs typeface="Calibri"/>
               </a:rPr>
@@ -32616,6 +32681,9 @@
             </a:r>
             <a:r>
               <a:rPr sz="3200" spc="-5" dirty="0">
+                <a:solidFill>
+                  <a:srgbClr val="00B050"/>
+                </a:solidFill>
                 <a:latin typeface="Calibri"/>
                 <a:cs typeface="Calibri"/>
               </a:rPr>
@@ -32623,6 +32691,9 @@
             </a:r>
             <a:r>
               <a:rPr sz="3200" i="1" spc="-15" dirty="0">
+                <a:solidFill>
+                  <a:srgbClr val="00B050"/>
+                </a:solidFill>
                 <a:latin typeface="Calibri"/>
                 <a:cs typeface="Calibri"/>
               </a:rPr>
@@ -32630,6 +32701,9 @@
             </a:r>
             <a:r>
               <a:rPr sz="3200" i="1" spc="15" dirty="0">
+                <a:solidFill>
+                  <a:srgbClr val="00B050"/>
+                </a:solidFill>
                 <a:latin typeface="Calibri"/>
                 <a:cs typeface="Calibri"/>
               </a:rPr>
@@ -32637,6 +32711,9 @@
             </a:r>
             <a:r>
               <a:rPr sz="3200" spc="-5" dirty="0">
+                <a:solidFill>
+                  <a:srgbClr val="00B050"/>
+                </a:solidFill>
                 <a:latin typeface="Calibri"/>
                 <a:cs typeface="Calibri"/>
               </a:rPr>
@@ -32644,6 +32721,9 @@
             </a:r>
             <a:r>
               <a:rPr sz="3200" dirty="0">
+                <a:solidFill>
+                  <a:srgbClr val="00B050"/>
+                </a:solidFill>
                 <a:latin typeface="Calibri"/>
                 <a:cs typeface="Calibri"/>
               </a:rPr>
@@ -32651,6 +32731,9 @@
             </a:r>
             <a:r>
               <a:rPr sz="3200" spc="-15" dirty="0">
+                <a:solidFill>
+                  <a:srgbClr val="00B050"/>
+                </a:solidFill>
                 <a:latin typeface="Calibri"/>
                 <a:cs typeface="Calibri"/>
               </a:rPr>
@@ -32658,6 +32741,9 @@
             </a:r>
             <a:r>
               <a:rPr sz="3200" spc="30" dirty="0">
+                <a:solidFill>
+                  <a:srgbClr val="00B050"/>
+                </a:solidFill>
                 <a:latin typeface="Calibri"/>
                 <a:cs typeface="Calibri"/>
               </a:rPr>
@@ -32665,6 +32751,9 @@
             </a:r>
             <a:r>
               <a:rPr sz="3200" spc="-15" dirty="0">
+                <a:solidFill>
+                  <a:srgbClr val="00B050"/>
+                </a:solidFill>
                 <a:latin typeface="Calibri"/>
                 <a:cs typeface="Calibri"/>
               </a:rPr>
@@ -32672,6 +32761,9 @@
             </a:r>
             <a:r>
               <a:rPr sz="3200" dirty="0">
+                <a:solidFill>
+                  <a:srgbClr val="00B050"/>
+                </a:solidFill>
                 <a:latin typeface="Calibri"/>
                 <a:cs typeface="Calibri"/>
               </a:rPr>
@@ -32679,6 +32771,9 @@
             </a:r>
             <a:r>
               <a:rPr sz="3200" spc="-5" dirty="0">
+                <a:solidFill>
+                  <a:srgbClr val="00B050"/>
+                </a:solidFill>
                 <a:latin typeface="Calibri"/>
                 <a:cs typeface="Calibri"/>
               </a:rPr>
@@ -32686,6 +32781,9 @@
             </a:r>
             <a:r>
               <a:rPr sz="3200" spc="10" dirty="0">
+                <a:solidFill>
+                  <a:srgbClr val="00B050"/>
+                </a:solidFill>
                 <a:latin typeface="Calibri"/>
                 <a:cs typeface="Calibri"/>
               </a:rPr>
@@ -32693,6 +32791,9 @@
             </a:r>
             <a:r>
               <a:rPr sz="3200" spc="-15" dirty="0">
+                <a:solidFill>
+                  <a:srgbClr val="00B050"/>
+                </a:solidFill>
                 <a:latin typeface="Calibri"/>
                 <a:cs typeface="Calibri"/>
               </a:rPr>
@@ -32700,6 +32801,9 @@
             </a:r>
             <a:r>
               <a:rPr sz="3200" spc="-710" dirty="0">
+                <a:solidFill>
+                  <a:srgbClr val="00B050"/>
+                </a:solidFill>
                 <a:latin typeface="Calibri"/>
                 <a:cs typeface="Calibri"/>
               </a:rPr>
@@ -32707,6 +32811,9 @@
             </a:r>
             <a:r>
               <a:rPr sz="3200" spc="-5" dirty="0">
+                <a:solidFill>
+                  <a:srgbClr val="00B050"/>
+                </a:solidFill>
                 <a:latin typeface="Calibri"/>
                 <a:cs typeface="Calibri"/>
               </a:rPr>
@@ -32714,6 +32821,9 @@
             </a:r>
             <a:r>
               <a:rPr sz="3200" spc="-30" dirty="0">
+                <a:solidFill>
+                  <a:srgbClr val="00B050"/>
+                </a:solidFill>
                 <a:latin typeface="Calibri"/>
                 <a:cs typeface="Calibri"/>
               </a:rPr>
@@ -32721,12 +32831,18 @@
             </a:r>
             <a:r>
               <a:rPr sz="3200" spc="-10" dirty="0">
+                <a:solidFill>
+                  <a:srgbClr val="00B050"/>
+                </a:solidFill>
                 <a:latin typeface="Calibri"/>
                 <a:cs typeface="Calibri"/>
               </a:rPr>
               <a:t>second.</a:t>
             </a:r>
             <a:endParaRPr sz="3200" dirty="0">
+              <a:solidFill>
+                <a:srgbClr val="00B050"/>
+              </a:solidFill>
               <a:latin typeface="Calibri"/>
               <a:cs typeface="Calibri"/>
             </a:endParaRPr>
